--- a/outputs/atlas-v3-native/roundtrip-ppt.pptx
+++ b/outputs/atlas-v3-native/roundtrip-ppt.pptx
@@ -13657,14 +13657,6 @@
       </p:sp>
     </p:spTree>
   </p:cSld>
-  <mc:AlternateContent>
-    <mc:Choice Requires="p14">
-      <p:transition spd="slow" p14:dur="2000"/>
-    </mc:Choice>
-    <mc:Fallback>
-      <p:transition spd="slow"/>
-    </mc:Fallback>
-  </mc:AlternateContent>
 </p:sld>
 </file>
 
@@ -13890,14 +13882,6 @@
       </p:graphicFrame>
     </p:spTree>
   </p:cSld>
-  <mc:AlternateContent>
-    <mc:Choice Requires="p14">
-      <p:transition spd="slow" p14:dur="2000"/>
-    </mc:Choice>
-    <mc:Fallback>
-      <p:transition spd="slow"/>
-    </mc:Fallback>
-  </mc:AlternateContent>
 </p:sld>
 </file>
 
@@ -16678,14 +16662,6 @@
       </p:graphicFrame>
     </p:spTree>
   </p:cSld>
-  <mc:AlternateContent>
-    <mc:Choice Requires="p14">
-      <p:transition spd="slow" p14:dur="2000"/>
-    </mc:Choice>
-    <mc:Fallback>
-      <p:transition spd="slow"/>
-    </mc:Fallback>
-  </mc:AlternateContent>
 </p:sld>
 </file>
 
@@ -16911,14 +16887,6 @@
       </p:graphicFrame>
     </p:spTree>
   </p:cSld>
-  <mc:AlternateContent>
-    <mc:Choice Requires="p14">
-      <p:transition spd="slow" p14:dur="2000"/>
-    </mc:Choice>
-    <mc:Fallback>
-      <p:transition spd="slow"/>
-    </mc:Fallback>
-  </mc:AlternateContent>
 </p:sld>
 </file>
 
@@ -17768,14 +17736,6 @@
       </p:cxnSp>
     </p:spTree>
   </p:cSld>
-  <mc:AlternateContent>
-    <mc:Choice Requires="p14">
-      <p:transition spd="slow" p14:dur="2000"/>
-    </mc:Choice>
-    <mc:Fallback>
-      <p:transition spd="slow"/>
-    </mc:Fallback>
-  </mc:AlternateContent>
 </p:sld>
 </file>
 
@@ -18492,14 +18452,6 @@
       </p:cxnSp>
     </p:spTree>
   </p:cSld>
-  <mc:AlternateContent>
-    <mc:Choice Requires="p14">
-      <p:transition spd="slow" p14:dur="2000"/>
-    </mc:Choice>
-    <mc:Fallback>
-      <p:transition spd="slow"/>
-    </mc:Fallback>
-  </mc:AlternateContent>
 </p:sld>
 </file>
 
@@ -19399,14 +19351,6 @@
       </p:cxnSp>
     </p:spTree>
   </p:cSld>
-  <mc:AlternateContent>
-    <mc:Choice Requires="p14">
-      <p:transition spd="slow" p14:dur="2000"/>
-    </mc:Choice>
-    <mc:Fallback>
-      <p:transition spd="slow"/>
-    </mc:Fallback>
-  </mc:AlternateContent>
 </p:sld>
 </file>
 
@@ -20730,14 +20674,6 @@
       </p:cxnSp>
     </p:spTree>
   </p:cSld>
-  <mc:AlternateContent>
-    <mc:Choice Requires="p14">
-      <p:transition spd="slow" p14:dur="2000"/>
-    </mc:Choice>
-    <mc:Fallback>
-      <p:transition spd="slow"/>
-    </mc:Fallback>
-  </mc:AlternateContent>
 </p:sld>
 </file>
 
@@ -21587,14 +21523,6 @@
       </p:cxnSp>
     </p:spTree>
   </p:cSld>
-  <mc:AlternateContent>
-    <mc:Choice Requires="p14">
-      <p:transition spd="slow" p14:dur="2000"/>
-    </mc:Choice>
-    <mc:Fallback>
-      <p:transition spd="slow"/>
-    </mc:Fallback>
-  </mc:AlternateContent>
 </p:sld>
 </file>
 
@@ -22444,14 +22372,6 @@
       </p:cxnSp>
     </p:spTree>
   </p:cSld>
-  <mc:AlternateContent>
-    <mc:Choice Requires="p14">
-      <p:transition spd="slow" p14:dur="2000"/>
-    </mc:Choice>
-    <mc:Fallback>
-      <p:transition spd="slow"/>
-    </mc:Fallback>
-  </mc:AlternateContent>
 </p:sld>
 </file>
 
@@ -22677,14 +22597,6 @@
       </p:graphicFrame>
     </p:spTree>
   </p:cSld>
-  <mc:AlternateContent>
-    <mc:Choice Requires="p14">
-      <p:transition spd="slow" p14:dur="2000"/>
-    </mc:Choice>
-    <mc:Fallback>
-      <p:transition spd="slow"/>
-    </mc:Fallback>
-  </mc:AlternateContent>
 </p:sld>
 </file>
 
@@ -22954,14 +22866,6 @@
       </p:sp>
     </p:spTree>
   </p:cSld>
-  <mc:AlternateContent>
-    <mc:Choice Requires="p14">
-      <p:transition spd="slow" p14:dur="2000"/>
-    </mc:Choice>
-    <mc:Fallback>
-      <p:transition spd="slow"/>
-    </mc:Fallback>
-  </mc:AlternateContent>
 </p:sld>
 </file>
 
@@ -23187,14 +23091,6 @@
       </p:graphicFrame>
     </p:spTree>
   </p:cSld>
-  <mc:AlternateContent>
-    <mc:Choice Requires="p14">
-      <p:transition spd="slow" p14:dur="2000"/>
-    </mc:Choice>
-    <mc:Fallback>
-      <p:transition spd="slow"/>
-    </mc:Fallback>
-  </mc:AlternateContent>
 </p:sld>
 </file>
 
@@ -24028,14 +23924,6 @@
       </p:sp>
     </p:spTree>
   </p:cSld>
-  <mc:AlternateContent>
-    <mc:Choice Requires="p14">
-      <p:transition spd="slow" p14:dur="2000"/>
-    </mc:Choice>
-    <mc:Fallback>
-      <p:transition spd="slow"/>
-    </mc:Fallback>
-  </mc:AlternateContent>
   <p:timing>
     <p:tnLst>
       <p:par>
@@ -25079,14 +24967,6 @@
       </p:sp>
     </p:spTree>
   </p:cSld>
-  <mc:AlternateContent>
-    <mc:Choice Requires="p14">
-      <p:transition spd="slow" p14:dur="2000"/>
-    </mc:Choice>
-    <mc:Fallback>
-      <p:transition spd="slow"/>
-    </mc:Fallback>
-  </mc:AlternateContent>
   <p:timing>
     <p:tnLst>
       <p:par>
@@ -25530,14 +25410,6 @@
       </p:pic>
     </p:spTree>
   </p:cSld>
-  <mc:AlternateContent>
-    <mc:Choice Requires="p14">
-      <p:transition spd="slow" p14:dur="2000"/>
-    </mc:Choice>
-    <mc:Fallback>
-      <p:transition spd="slow"/>
-    </mc:Fallback>
-  </mc:AlternateContent>
 </p:sld>
 </file>
 
@@ -25891,14 +25763,6 @@
       </p:sp>
     </p:spTree>
   </p:cSld>
-  <mc:AlternateContent>
-    <mc:Choice Requires="p14">
-      <p:transition spd="slow" p14:dur="2000"/>
-    </mc:Choice>
-    <mc:Fallback>
-      <p:transition spd="slow"/>
-    </mc:Fallback>
-  </mc:AlternateContent>
 </p:sld>
 </file>
 
@@ -26192,14 +26056,6 @@
       </p:sp>
     </p:spTree>
   </p:cSld>
-  <mc:AlternateContent>
-    <mc:Choice Requires="p14">
-      <p:transition spd="slow" p14:dur="2000"/>
-    </mc:Choice>
-    <mc:Fallback>
-      <p:transition spd="slow"/>
-    </mc:Fallback>
-  </mc:AlternateContent>
 </p:sld>
 </file>
 
@@ -26577,14 +26433,6 @@
       </p:sp>
     </p:spTree>
   </p:cSld>
-  <mc:AlternateContent>
-    <mc:Choice Requires="p14">
-      <p:transition spd="slow" p14:dur="2000"/>
-    </mc:Choice>
-    <mc:Fallback>
-      <p:transition spd="slow"/>
-    </mc:Fallback>
-  </mc:AlternateContent>
 </p:sld>
 </file>
 
@@ -26818,14 +26666,6 @@
       </p:pic>
     </p:spTree>
   </p:cSld>
-  <mc:AlternateContent>
-    <mc:Choice Requires="p14">
-      <p:transition spd="slow" p14:dur="2000"/>
-    </mc:Choice>
-    <mc:Fallback>
-      <p:transition spd="slow"/>
-    </mc:Fallback>
-  </mc:AlternateContent>
 </p:sld>
 </file>
 
@@ -27686,14 +27526,6 @@
       </p:cxnSp>
     </p:spTree>
   </p:cSld>
-  <mc:AlternateContent>
-    <mc:Choice Requires="p14">
-      <p:transition spd="slow" p14:dur="2000"/>
-    </mc:Choice>
-    <mc:Fallback>
-      <p:transition spd="slow"/>
-    </mc:Fallback>
-  </mc:AlternateContent>
 </p:sld>
 </file>
 
@@ -27999,14 +27831,6 @@
       </p:pic>
     </p:spTree>
   </p:cSld>
-  <mc:AlternateContent>
-    <mc:Choice Requires="p14">
-      <p:transition spd="slow" p14:dur="2000"/>
-    </mc:Choice>
-    <mc:Fallback>
-      <p:transition spd="slow"/>
-    </mc:Fallback>
-  </mc:AlternateContent>
 </p:sld>
 </file>
 
@@ -28276,14 +28100,6 @@
       </p:sp>
     </p:spTree>
   </p:cSld>
-  <mc:AlternateContent>
-    <mc:Choice Requires="p14">
-      <p:transition spd="slow" p14:dur="2000"/>
-    </mc:Choice>
-    <mc:Fallback>
-      <p:transition spd="slow"/>
-    </mc:Fallback>
-  </mc:AlternateContent>
 </p:sld>
 </file>
 
@@ -29696,14 +29512,6 @@
       </p:graphicFrame>
     </p:spTree>
   </p:cSld>
-  <mc:AlternateContent>
-    <mc:Choice Requires="p14">
-      <p:transition spd="slow" p14:dur="2000"/>
-    </mc:Choice>
-    <mc:Fallback>
-      <p:transition spd="slow"/>
-    </mc:Fallback>
-  </mc:AlternateContent>
 </p:sld>
 </file>
 
@@ -30770,14 +30578,6 @@
       </p:cxnSp>
     </p:spTree>
   </p:cSld>
-  <mc:AlternateContent>
-    <mc:Choice Requires="p14">
-      <p:transition spd="slow" p14:dur="2000"/>
-    </mc:Choice>
-    <mc:Fallback>
-      <p:transition spd="slow"/>
-    </mc:Fallback>
-  </mc:AlternateContent>
 </p:sld>
 </file>
 
@@ -31084,14 +30884,6 @@
       </mc:AlternateContent>
     </p:spTree>
   </p:cSld>
-  <mc:AlternateContent>
-    <mc:Choice Requires="p14">
-      <p:transition spd="slow" p14:dur="2000"/>
-    </mc:Choice>
-    <mc:Fallback>
-      <p:transition spd="slow"/>
-    </mc:Fallback>
-  </mc:AlternateContent>
 </p:sld>
 </file>
 
@@ -31783,14 +31575,6 @@
       </p:graphicFrame>
     </p:spTree>
   </p:cSld>
-  <mc:AlternateContent>
-    <mc:Choice Requires="p14">
-      <p:transition spd="slow" p14:dur="2000"/>
-    </mc:Choice>
-    <mc:Fallback>
-      <p:transition spd="slow"/>
-    </mc:Fallback>
-  </mc:AlternateContent>
 </p:sld>
 </file>
 
@@ -32016,14 +31800,6 @@
       </p:graphicFrame>
     </p:spTree>
   </p:cSld>
-  <mc:AlternateContent>
-    <mc:Choice Requires="p14">
-      <p:transition spd="slow" p14:dur="2000"/>
-    </mc:Choice>
-    <mc:Fallback>
-      <p:transition spd="slow"/>
-    </mc:Fallback>
-  </mc:AlternateContent>
 </p:sld>
 </file>
 
@@ -32249,14 +32025,6 @@
       </p:graphicFrame>
     </p:spTree>
   </p:cSld>
-  <mc:AlternateContent>
-    <mc:Choice Requires="p14">
-      <p:transition spd="slow" p14:dur="2000"/>
-    </mc:Choice>
-    <mc:Fallback>
-      <p:transition spd="slow"/>
-    </mc:Fallback>
-  </mc:AlternateContent>
 </p:sld>
 </file>
 
@@ -34276,14 +34044,6 @@
       </p:graphicFrame>
     </p:spTree>
   </p:cSld>
-  <mc:AlternateContent>
-    <mc:Choice Requires="p14">
-      <p:transition spd="slow" p14:dur="2000"/>
-    </mc:Choice>
-    <mc:Fallback>
-      <p:transition spd="slow"/>
-    </mc:Fallback>
-  </mc:AlternateContent>
 </p:sld>
 </file>
 
@@ -34903,14 +34663,6 @@
       </p:graphicFrame>
     </p:spTree>
   </p:cSld>
-  <mc:AlternateContent>
-    <mc:Choice Requires="p14">
-      <p:transition spd="slow" p14:dur="2000"/>
-    </mc:Choice>
-    <mc:Fallback>
-      <p:transition spd="slow"/>
-    </mc:Fallback>
-  </mc:AlternateContent>
 </p:sld>
 </file>
 
@@ -35180,14 +34932,6 @@
       </p:sp>
     </p:spTree>
   </p:cSld>
-  <mc:AlternateContent>
-    <mc:Choice Requires="p14">
-      <p:transition spd="slow" p14:dur="2000"/>
-    </mc:Choice>
-    <mc:Fallback>
-      <p:transition spd="slow"/>
-    </mc:Fallback>
-  </mc:AlternateContent>
 </p:sld>
 </file>
 
@@ -35457,14 +35201,6 @@
       </p:sp>
     </p:spTree>
   </p:cSld>
-  <mc:AlternateContent>
-    <mc:Choice Requires="p14">
-      <p:transition spd="slow" p14:dur="2000"/>
-    </mc:Choice>
-    <mc:Fallback>
-      <p:transition spd="slow"/>
-    </mc:Fallback>
-  </mc:AlternateContent>
 </p:sld>
 </file>
 
@@ -35842,14 +35578,6 @@
       </p:sp>
     </p:spTree>
   </p:cSld>
-  <mc:AlternateContent>
-    <mc:Choice Requires="p14">
-      <p:transition spd="slow" p14:dur="2000"/>
-    </mc:Choice>
-    <mc:Fallback>
-      <p:transition spd="slow"/>
-    </mc:Fallback>
-  </mc:AlternateContent>
 </p:sld>
 </file>
 
@@ -36075,14 +35803,6 @@
       </p:graphicFrame>
     </p:spTree>
   </p:cSld>
-  <mc:AlternateContent>
-    <mc:Choice Requires="p14">
-      <p:transition spd="slow" p14:dur="2000"/>
-    </mc:Choice>
-    <mc:Fallback>
-      <p:transition spd="slow"/>
-    </mc:Fallback>
-  </mc:AlternateContent>
 </p:sld>
 </file>
 
@@ -36308,14 +36028,6 @@
       </p:graphicFrame>
     </p:spTree>
   </p:cSld>
-  <mc:AlternateContent>
-    <mc:Choice Requires="p14">
-      <p:transition spd="slow" p14:dur="2000"/>
-    </mc:Choice>
-    <mc:Fallback>
-      <p:transition spd="slow"/>
-    </mc:Fallback>
-  </mc:AlternateContent>
 </p:sld>
 </file>
 
@@ -36541,14 +36253,6 @@
       </p:graphicFrame>
     </p:spTree>
   </p:cSld>
-  <mc:AlternateContent>
-    <mc:Choice Requires="p14">
-      <p:transition spd="slow" p14:dur="2000"/>
-    </mc:Choice>
-    <mc:Fallback>
-      <p:transition spd="slow"/>
-    </mc:Fallback>
-  </mc:AlternateContent>
 </p:sld>
 </file>
 
@@ -36774,14 +36478,6 @@
       </p:graphicFrame>
     </p:spTree>
   </p:cSld>
-  <mc:AlternateContent>
-    <mc:Choice Requires="p14">
-      <p:transition spd="slow" p14:dur="2000"/>
-    </mc:Choice>
-    <mc:Fallback>
-      <p:transition spd="slow"/>
-    </mc:Fallback>
-  </mc:AlternateContent>
 </p:sld>
 </file>
 
